--- a/classes/parte-1-machine-learning-clasico/082-regresion-con-arboles/clase-082-regresion-con-arboles-presentacion.pptx
+++ b/classes/parte-1-machine-learning-clasico/082-regresion-con-arboles/clase-082-regresion-con-arboles-presentacion.pptx
@@ -4823,7 +4823,7 @@
                 </a:solidFill>
                 <a:latin typeface="Segoe UI"/>
               </a:rPr>
-              <a:t>Primer bloque ejecutable del notebook.</a:t>
+              <a:t>Generamos y = sin(x) + ruido y entrenamos árboles de max_depth=2 y max_depth=5. Se ven las escaleras: más profundidad = más escalones.</a:t>
             </a:r>
           </a:p>
         </p:txBody>
@@ -4910,7 +4910,387 @@
                 </a:solidFill>
                 <a:latin typeface="Courier New"/>
               </a:rPr>
-              <a:t># Imports y configuración inicial</a:t>
+              <a:t>import numpy as np</a:t>
+            </a:r>
+          </a:p>
+          <a:p>
+            <a:pPr>
+              <a:defRPr sz="1200" b="0">
+                <a:solidFill>
+                  <a:srgbClr val="F8FAFC"/>
+                </a:solidFill>
+                <a:latin typeface="Courier New"/>
+              </a:defRPr>
+            </a:pPr>
+            <a:r>
+              <a:rPr sz="1200" b="0">
+                <a:solidFill>
+                  <a:srgbClr val="F8FAFC"/>
+                </a:solidFill>
+                <a:latin typeface="Courier New"/>
+              </a:rPr>
+              <a:t>import matplotlib.pyplot as plt</a:t>
+            </a:r>
+          </a:p>
+          <a:p>
+            <a:pPr>
+              <a:defRPr sz="1200" b="0">
+                <a:solidFill>
+                  <a:srgbClr val="F8FAFC"/>
+                </a:solidFill>
+                <a:latin typeface="Courier New"/>
+              </a:defRPr>
+            </a:pPr>
+            <a:r>
+              <a:rPr sz="1200" b="0">
+                <a:solidFill>
+                  <a:srgbClr val="F8FAFC"/>
+                </a:solidFill>
+                <a:latin typeface="Courier New"/>
+              </a:rPr>
+              <a:t>from sklearn.tree import DecisionTreeRegressor</a:t>
+            </a:r>
+          </a:p>
+          <a:p>
+            <a:pPr>
+              <a:defRPr sz="1200" b="0">
+                <a:solidFill>
+                  <a:srgbClr val="F8FAFC"/>
+                </a:solidFill>
+                <a:latin typeface="Courier New"/>
+              </a:defRPr>
+            </a:pPr>
+            <a:r>
+              <a:rPr sz="1200" b="0">
+                <a:solidFill>
+                  <a:srgbClr val="F8FAFC"/>
+                </a:solidFill>
+                <a:latin typeface="Courier New"/>
+              </a:rPr>
+              <a:t>from sklearn.linear_model import LinearRegression</a:t>
+            </a:r>
+          </a:p>
+          <a:p>
+            <a:pPr>
+              <a:defRPr sz="1200" b="0">
+                <a:solidFill>
+                  <a:srgbClr val="F8FAFC"/>
+                </a:solidFill>
+                <a:latin typeface="Courier New"/>
+              </a:defRPr>
+            </a:pPr>
+            <a:r>
+              <a:rPr sz="1200" b="0">
+                <a:solidFill>
+                  <a:srgbClr val="F8FAFC"/>
+                </a:solidFill>
+                <a:latin typeface="Courier New"/>
+              </a:rPr>
+              <a:t>from sklearn.datasets import load_diabetes</a:t>
+            </a:r>
+          </a:p>
+          <a:p>
+            <a:pPr>
+              <a:defRPr sz="1200" b="0">
+                <a:solidFill>
+                  <a:srgbClr val="F8FAFC"/>
+                </a:solidFill>
+                <a:latin typeface="Courier New"/>
+              </a:defRPr>
+            </a:pPr>
+            <a:r>
+              <a:rPr sz="1200" b="0">
+                <a:solidFill>
+                  <a:srgbClr val="F8FAFC"/>
+                </a:solidFill>
+                <a:latin typeface="Courier New"/>
+              </a:rPr>
+              <a:t>from sklearn.model_selection import train_test_split, cross_val_score</a:t>
+            </a:r>
+          </a:p>
+          <a:p>
+            <a:pPr>
+              <a:defRPr sz="1200" b="0">
+                <a:solidFill>
+                  <a:srgbClr val="F8FAFC"/>
+                </a:solidFill>
+                <a:latin typeface="Courier New"/>
+              </a:defRPr>
+            </a:pPr>
+            <a:r>
+              <a:rPr sz="1200" b="0">
+                <a:solidFill>
+                  <a:srgbClr val="F8FAFC"/>
+                </a:solidFill>
+                <a:latin typeface="Courier New"/>
+              </a:rPr>
+              <a:t>from sklearn.metrics import mean_squared_error</a:t>
+            </a:r>
+          </a:p>
+          <a:p>
+            <a:pPr>
+              <a:defRPr sz="1200" b="0">
+                <a:solidFill>
+                  <a:srgbClr val="F8FAFC"/>
+                </a:solidFill>
+                <a:latin typeface="Courier New"/>
+              </a:defRPr>
+            </a:pPr>
+            <a:r>
+              <a:rPr sz="1200" b="0">
+                <a:solidFill>
+                  <a:srgbClr val="F8FAFC"/>
+                </a:solidFill>
+                <a:latin typeface="Courier New"/>
+              </a:rPr>
+              <a:t> </a:t>
+            </a:r>
+          </a:p>
+          <a:p>
+            <a:pPr>
+              <a:defRPr sz="1200" b="0">
+                <a:solidFill>
+                  <a:srgbClr val="F8FAFC"/>
+                </a:solidFill>
+                <a:latin typeface="Courier New"/>
+              </a:defRPr>
+            </a:pPr>
+            <a:r>
+              <a:rPr sz="1200" b="0">
+                <a:solidFill>
+                  <a:srgbClr val="F8FAFC"/>
+                </a:solidFill>
+                <a:latin typeface="Courier New"/>
+              </a:rPr>
+              <a:t>RND = 42</a:t>
+            </a:r>
+          </a:p>
+          <a:p>
+            <a:pPr>
+              <a:defRPr sz="1200" b="0">
+                <a:solidFill>
+                  <a:srgbClr val="F8FAFC"/>
+                </a:solidFill>
+                <a:latin typeface="Courier New"/>
+              </a:defRPr>
+            </a:pPr>
+            <a:r>
+              <a:rPr sz="1200" b="0">
+                <a:solidFill>
+                  <a:srgbClr val="F8FAFC"/>
+                </a:solidFill>
+                <a:latin typeface="Courier New"/>
+              </a:rPr>
+              <a:t>rng = np.random.default_rng(RND)</a:t>
+            </a:r>
+          </a:p>
+          <a:p>
+            <a:pPr>
+              <a:defRPr sz="1200" b="0">
+                <a:solidFill>
+                  <a:srgbClr val="F8FAFC"/>
+                </a:solidFill>
+                <a:latin typeface="Courier New"/>
+              </a:defRPr>
+            </a:pPr>
+            <a:r>
+              <a:rPr sz="1200" b="0">
+                <a:solidFill>
+                  <a:srgbClr val="F8FAFC"/>
+                </a:solidFill>
+                <a:latin typeface="Courier New"/>
+              </a:rPr>
+              <a:t>x = np.linspace(-3, 3, 200)</a:t>
+            </a:r>
+          </a:p>
+          <a:p>
+            <a:pPr>
+              <a:defRPr sz="1200" b="0">
+                <a:solidFill>
+                  <a:srgbClr val="F8FAFC"/>
+                </a:solidFill>
+                <a:latin typeface="Courier New"/>
+              </a:defRPr>
+            </a:pPr>
+            <a:r>
+              <a:rPr sz="1200" b="0">
+                <a:solidFill>
+                  <a:srgbClr val="F8FAFC"/>
+                </a:solidFill>
+                <a:latin typeface="Courier New"/>
+              </a:rPr>
+              <a:t>y = np.sin(x) + rng.normal(0, 0.1, size=x.size)</a:t>
+            </a:r>
+          </a:p>
+          <a:p>
+            <a:pPr>
+              <a:defRPr sz="1200" b="0">
+                <a:solidFill>
+                  <a:srgbClr val="F8FAFC"/>
+                </a:solidFill>
+                <a:latin typeface="Courier New"/>
+              </a:defRPr>
+            </a:pPr>
+            <a:r>
+              <a:rPr sz="1200" b="0">
+                <a:solidFill>
+                  <a:srgbClr val="F8FAFC"/>
+                </a:solidFill>
+                <a:latin typeface="Courier New"/>
+              </a:rPr>
+              <a:t>X = x.reshape(-1, 1)</a:t>
+            </a:r>
+          </a:p>
+          <a:p>
+            <a:pPr>
+              <a:defRPr sz="1200" b="0">
+                <a:solidFill>
+                  <a:srgbClr val="F8FAFC"/>
+                </a:solidFill>
+                <a:latin typeface="Courier New"/>
+              </a:defRPr>
+            </a:pPr>
+            <a:r>
+              <a:rPr sz="1200" b="0">
+                <a:solidFill>
+                  <a:srgbClr val="F8FAFC"/>
+                </a:solidFill>
+                <a:latin typeface="Courier New"/>
+              </a:rPr>
+              <a:t> </a:t>
+            </a:r>
+          </a:p>
+          <a:p>
+            <a:pPr>
+              <a:defRPr sz="1200" b="0">
+                <a:solidFill>
+                  <a:srgbClr val="F8FAFC"/>
+                </a:solidFill>
+                <a:latin typeface="Courier New"/>
+              </a:defRPr>
+            </a:pPr>
+            <a:r>
+              <a:rPr sz="1200" b="0">
+                <a:solidFill>
+                  <a:srgbClr val="F8FAFC"/>
+                </a:solidFill>
+                <a:latin typeface="Courier New"/>
+              </a:rPr>
+              <a:t>fig, ax = plt.subplots(figsize=(7, 5))</a:t>
+            </a:r>
+          </a:p>
+          <a:p>
+            <a:pPr>
+              <a:defRPr sz="1200" b="0">
+                <a:solidFill>
+                  <a:srgbClr val="F8FAFC"/>
+                </a:solidFill>
+                <a:latin typeface="Courier New"/>
+              </a:defRPr>
+            </a:pPr>
+            <a:r>
+              <a:rPr sz="1200" b="0">
+                <a:solidFill>
+                  <a:srgbClr val="F8FAFC"/>
+                </a:solidFill>
+                <a:latin typeface="Courier New"/>
+              </a:rPr>
+              <a:t>ax.scatter(x, y, s=12, c="lightgray", label="datos")</a:t>
+            </a:r>
+          </a:p>
+          <a:p>
+            <a:pPr>
+              <a:defRPr sz="1200" b="0">
+                <a:solidFill>
+                  <a:srgbClr val="F8FAFC"/>
+                </a:solidFill>
+                <a:latin typeface="Courier New"/>
+              </a:defRPr>
+            </a:pPr>
+            <a:r>
+              <a:rPr sz="1200" b="0">
+                <a:solidFill>
+                  <a:srgbClr val="F8FAFC"/>
+                </a:solidFill>
+                <a:latin typeface="Courier New"/>
+              </a:rPr>
+              <a:t>for d, color in [(2, "tab:blue"), (5, "tab:red")]:</a:t>
+            </a:r>
+          </a:p>
+          <a:p>
+            <a:pPr>
+              <a:defRPr sz="1200" b="0">
+                <a:solidFill>
+                  <a:srgbClr val="F8FAFC"/>
+                </a:solidFill>
+                <a:latin typeface="Courier New"/>
+              </a:defRPr>
+            </a:pPr>
+            <a:r>
+              <a:rPr sz="1200" b="0">
+                <a:solidFill>
+                  <a:srgbClr val="F8FAFC"/>
+                </a:solidFill>
+                <a:latin typeface="Courier New"/>
+              </a:rPr>
+              <a:t>    m = DecisionTreeRegressor(max_depth=d, random_state=RND).fit(X, y)</a:t>
+            </a:r>
+          </a:p>
+          <a:p>
+            <a:pPr>
+              <a:defRPr sz="1200" b="0">
+                <a:solidFill>
+                  <a:srgbClr val="F8FAFC"/>
+                </a:solidFill>
+                <a:latin typeface="Courier New"/>
+              </a:defRPr>
+            </a:pPr>
+            <a:r>
+              <a:rPr sz="1200" b="0">
+                <a:solidFill>
+                  <a:srgbClr val="F8FAFC"/>
+                </a:solidFill>
+                <a:latin typeface="Courier New"/>
+              </a:rPr>
+              <a:t>    ax.plot(x, m.predict(X), color=color, lw=2, label=f"max_depth={d}")</a:t>
+            </a:r>
+          </a:p>
+          <a:p>
+            <a:pPr>
+              <a:defRPr sz="1200" b="0">
+                <a:solidFill>
+                  <a:srgbClr val="F8FAFC"/>
+                </a:solidFill>
+                <a:latin typeface="Courier New"/>
+              </a:defRPr>
+            </a:pPr>
+            <a:r>
+              <a:rPr sz="1200" b="0">
+                <a:solidFill>
+                  <a:srgbClr val="F8FAFC"/>
+                </a:solidFill>
+                <a:latin typeface="Courier New"/>
+              </a:rPr>
+              <a:t>ax.set_title("Prediccion escalonada del arbol"); ax.legend()</a:t>
+            </a:r>
+          </a:p>
+          <a:p>
+            <a:pPr>
+              <a:defRPr sz="1200" b="0">
+                <a:solidFill>
+                  <a:srgbClr val="F8FAFC"/>
+                </a:solidFill>
+                <a:latin typeface="Courier New"/>
+              </a:defRPr>
+            </a:pPr>
+            <a:r>
+              <a:rPr sz="1200" b="0">
+                <a:solidFill>
+                  <a:srgbClr val="F8FAFC"/>
+                </a:solidFill>
+                <a:latin typeface="Courier New"/>
+              </a:rPr>
+              <a:t># ... (truncado)</a:t>
             </a:r>
           </a:p>
         </p:txBody>

--- a/classes/parte-1-machine-learning-clasico/082-regresion-con-arboles/clase-082-regresion-con-arboles-presentacion.pptx
+++ b/classes/parte-1-machine-learning-clasico/082-regresion-con-arboles/clase-082-regresion-con-arboles-presentacion.pptx
@@ -3272,7 +3272,7 @@
                 </a:solidFill>
                 <a:latin typeface="Segoe UI"/>
               </a:rPr>
-              <a:t>Parte: 1 — Machine Learning Clásico · Fuente: Géron, cap. 6.  Duración estimada: 45 min.</a:t>
+              <a:t>Parte: 1 — Machine Learning Clásico · Fuente: Géron, cap. 6.  Duración estimada: 45 min. · Nivel: Intermedio</a:t>
             </a:r>
           </a:p>
         </p:txBody>
@@ -3581,7 +3581,7 @@
                 </a:solidFill>
                 <a:latin typeface="Segoe UI"/>
               </a:rPr>
-              <a:t>Parte: 1 — Machine Learning Clásico · Fuente: Géron, cap. 6.  Duración estimada: 45 min.</a:t>
+              <a:t>Parte: 1 — Machine Learning Clásico · Fuente: Géron, cap. 6.  Duración estimada: 45 min. · Nivel: Intermedio</a:t>
             </a:r>
           </a:p>
         </p:txBody>
